--- a/docs/bag-darga-tanilsuulga.pptx
+++ b/docs/bag-darga-tanilsuulga.pptx
@@ -3512,24 +3512,26 @@
       </p:sp>
       <p:sp>
         <p:nvSpPr>
-          <p:cNvPr id="6" name="Rectangle 5"/>
+          <p:cNvPr id="6" name="Rounded Rectangle 5"/>
           <p:cNvSpPr/>
           <p:nvPr/>
         </p:nvSpPr>
         <p:spPr>
           <a:xfrm>
-            <a:off x="457200" y="1280160"/>
-            <a:ext cx="4754880" cy="5212080"/>
-          </a:xfrm>
-          <a:prstGeom prst="rect">
-            <a:avLst/>
+            <a:off x="1251471" y="1162889"/>
+            <a:ext cx="3166337" cy="5446622"/>
+          </a:xfrm>
+          <a:prstGeom prst="roundRect">
+            <a:avLst>
+              <a:gd name="adj" fmla="val 5000"/>
+            </a:avLst>
           </a:prstGeom>
           <a:solidFill>
-            <a:srgbClr val="FFFFFF"/>
+            <a:srgbClr val="212121"/>
           </a:solidFill>
-          <a:ln w="38100">
+          <a:ln w="25400">
             <a:solidFill>
-              <a:srgbClr val="FFB800"/>
+              <a:srgbClr val="555555"/>
             </a:solidFill>
           </a:ln>
         </p:spPr>
@@ -3548,39 +3550,40 @@
           </a:fontRef>
         </p:style>
         <p:txBody>
-          <a:bodyPr rtlCol="0" anchor="ctr" wrap="square"/>
+          <a:bodyPr rtlCol="0" anchor="ctr"/>
           <a:lstStyle/>
           <a:p>
             <a:pPr algn="ctr"/>
-            <a:r>
-              <a:rPr sz="2400" b="1">
-                <a:solidFill>
-                  <a:srgbClr val="FFB800"/>
-                </a:solidFill>
-                <a:latin typeface="Arial"/>
-              </a:rPr>
-              <a:t>📷 ЗУРАГ</a:t>
-            </a:r>
-          </a:p>
-          <a:p>
-            <a:pPr algn="ctr"/>
-            <a:r>
-              <a:rPr sz="1400">
-                <a:solidFill>
-                  <a:srgbClr val="555555"/>
-                </a:solidFill>
-                <a:latin typeface="Arial"/>
-              </a:rPr>
-              <a:t>
-Хөгшин малчны видео карт
-Аудио сонсох товч</a:t>
-            </a:r>
-          </a:p>
-        </p:txBody>
-      </p:sp>
-      <p:sp>
-        <p:nvSpPr>
-          <p:cNvPr id="7" name="TextBox 6"/>
+          </a:p>
+        </p:txBody>
+      </p:sp>
+      <p:pic>
+        <p:nvPicPr>
+          <p:cNvPr id="7" name="Picture 6" descr="07-elder.png"/>
+          <p:cNvPicPr>
+            <a:picLocks noChangeAspect="1"/>
+          </p:cNvPicPr>
+          <p:nvPr/>
+        </p:nvPicPr>
+        <p:blipFill>
+          <a:blip r:embed="rId2"/>
+          <a:stretch>
+            <a:fillRect/>
+          </a:stretch>
+        </p:blipFill>
+        <p:spPr>
+          <a:xfrm>
+            <a:off x="1368742" y="1280160"/>
+            <a:ext cx="2931795" cy="5212080"/>
+          </a:xfrm>
+          <a:prstGeom prst="rect">
+            <a:avLst/>
+          </a:prstGeom>
+        </p:spPr>
+      </p:pic>
+      <p:sp>
+        <p:nvSpPr>
+          <p:cNvPr id="8" name="TextBox 7"/>
           <p:cNvSpPr txBox="1"/>
           <p:nvPr/>
         </p:nvSpPr>
@@ -3615,7 +3618,7 @@
       </p:sp>
       <p:sp>
         <p:nvSpPr>
-          <p:cNvPr id="8" name="TextBox 7"/>
+          <p:cNvPr id="9" name="TextBox 8"/>
           <p:cNvSpPr txBox="1"/>
           <p:nvPr/>
         </p:nvSpPr>
@@ -3686,7 +3689,7 @@
       </p:sp>
       <p:sp>
         <p:nvSpPr>
-          <p:cNvPr id="9" name="TextBox 8"/>
+          <p:cNvPr id="10" name="TextBox 9"/>
           <p:cNvSpPr txBox="1"/>
           <p:nvPr/>
         </p:nvSpPr>
@@ -3721,7 +3724,7 @@
       </p:sp>
       <p:sp>
         <p:nvSpPr>
-          <p:cNvPr id="10" name="TextBox 9"/>
+          <p:cNvPr id="11" name="TextBox 10"/>
           <p:cNvSpPr txBox="1"/>
           <p:nvPr/>
         </p:nvSpPr>
@@ -3951,24 +3954,26 @@
       </p:sp>
       <p:sp>
         <p:nvSpPr>
-          <p:cNvPr id="6" name="Rectangle 5"/>
+          <p:cNvPr id="6" name="Rounded Rectangle 5"/>
           <p:cNvSpPr/>
           <p:nvPr/>
         </p:nvSpPr>
         <p:spPr>
           <a:xfrm>
-            <a:off x="457200" y="1280160"/>
-            <a:ext cx="4754880" cy="5212080"/>
-          </a:xfrm>
-          <a:prstGeom prst="rect">
-            <a:avLst/>
+            <a:off x="1251471" y="1162889"/>
+            <a:ext cx="3166337" cy="5446622"/>
+          </a:xfrm>
+          <a:prstGeom prst="roundRect">
+            <a:avLst>
+              <a:gd name="adj" fmla="val 5000"/>
+            </a:avLst>
           </a:prstGeom>
           <a:solidFill>
-            <a:srgbClr val="FFFFFF"/>
+            <a:srgbClr val="212121"/>
           </a:solidFill>
-          <a:ln w="38100">
+          <a:ln w="25400">
             <a:solidFill>
-              <a:srgbClr val="FFB800"/>
+              <a:srgbClr val="555555"/>
             </a:solidFill>
           </a:ln>
         </p:spPr>
@@ -3987,39 +3992,40 @@
           </a:fontRef>
         </p:style>
         <p:txBody>
-          <a:bodyPr rtlCol="0" anchor="ctr" wrap="square"/>
+          <a:bodyPr rtlCol="0" anchor="ctr"/>
           <a:lstStyle/>
           <a:p>
             <a:pPr algn="ctr"/>
-            <a:r>
-              <a:rPr sz="2400" b="1">
-                <a:solidFill>
-                  <a:srgbClr val="FFB800"/>
-                </a:solidFill>
-                <a:latin typeface="Arial"/>
-              </a:rPr>
-              <a:t>📷 ЗУРАГ</a:t>
-            </a:r>
-          </a:p>
-          <a:p>
-            <a:pPr algn="ctr"/>
-            <a:r>
-              <a:rPr sz="1400">
-                <a:solidFill>
-                  <a:srgbClr val="555555"/>
-                </a:solidFill>
-                <a:latin typeface="Arial"/>
-              </a:rPr>
-              <a:t>
-Алдсан мал зарлах хуудас
-Ойролцоох олдсон малын жагсаалт</a:t>
-            </a:r>
-          </a:p>
-        </p:txBody>
-      </p:sp>
-      <p:sp>
-        <p:nvSpPr>
-          <p:cNvPr id="7" name="TextBox 6"/>
+          </a:p>
+        </p:txBody>
+      </p:sp>
+      <p:pic>
+        <p:nvPicPr>
+          <p:cNvPr id="7" name="Picture 6" descr="08-lost-found.png"/>
+          <p:cNvPicPr>
+            <a:picLocks noChangeAspect="1"/>
+          </p:cNvPicPr>
+          <p:nvPr/>
+        </p:nvPicPr>
+        <p:blipFill>
+          <a:blip r:embed="rId2"/>
+          <a:stretch>
+            <a:fillRect/>
+          </a:stretch>
+        </p:blipFill>
+        <p:spPr>
+          <a:xfrm>
+            <a:off x="1368742" y="1280160"/>
+            <a:ext cx="2931795" cy="5212080"/>
+          </a:xfrm>
+          <a:prstGeom prst="rect">
+            <a:avLst/>
+          </a:prstGeom>
+        </p:spPr>
+      </p:pic>
+      <p:sp>
+        <p:nvSpPr>
+          <p:cNvPr id="8" name="TextBox 7"/>
           <p:cNvSpPr txBox="1"/>
           <p:nvPr/>
         </p:nvSpPr>
@@ -4054,7 +4060,7 @@
       </p:sp>
       <p:sp>
         <p:nvSpPr>
-          <p:cNvPr id="8" name="TextBox 7"/>
+          <p:cNvPr id="9" name="TextBox 8"/>
           <p:cNvSpPr txBox="1"/>
           <p:nvPr/>
         </p:nvSpPr>
@@ -4109,7 +4115,7 @@
       </p:sp>
       <p:sp>
         <p:nvSpPr>
-          <p:cNvPr id="9" name="TextBox 8"/>
+          <p:cNvPr id="10" name="TextBox 9"/>
           <p:cNvSpPr txBox="1"/>
           <p:nvPr/>
         </p:nvSpPr>
@@ -4144,7 +4150,7 @@
       </p:sp>
       <p:sp>
         <p:nvSpPr>
-          <p:cNvPr id="10" name="TextBox 9"/>
+          <p:cNvPr id="11" name="TextBox 10"/>
           <p:cNvSpPr txBox="1"/>
           <p:nvPr/>
         </p:nvSpPr>
@@ -4374,24 +4380,26 @@
       </p:sp>
       <p:sp>
         <p:nvSpPr>
-          <p:cNvPr id="6" name="Rectangle 5"/>
+          <p:cNvPr id="6" name="Rounded Rectangle 5"/>
           <p:cNvSpPr/>
           <p:nvPr/>
         </p:nvSpPr>
         <p:spPr>
           <a:xfrm>
-            <a:off x="457200" y="1280160"/>
-            <a:ext cx="4754880" cy="5212080"/>
-          </a:xfrm>
-          <a:prstGeom prst="rect">
-            <a:avLst/>
+            <a:off x="1251471" y="1162889"/>
+            <a:ext cx="3166337" cy="5446622"/>
+          </a:xfrm>
+          <a:prstGeom prst="roundRect">
+            <a:avLst>
+              <a:gd name="adj" fmla="val 5000"/>
+            </a:avLst>
           </a:prstGeom>
           <a:solidFill>
-            <a:srgbClr val="FFFFFF"/>
+            <a:srgbClr val="212121"/>
           </a:solidFill>
-          <a:ln w="38100">
+          <a:ln w="25400">
             <a:solidFill>
-              <a:srgbClr val="FFB800"/>
+              <a:srgbClr val="555555"/>
             </a:solidFill>
           </a:ln>
         </p:spPr>
@@ -4410,39 +4418,40 @@
           </a:fontRef>
         </p:style>
         <p:txBody>
-          <a:bodyPr rtlCol="0" anchor="ctr" wrap="square"/>
+          <a:bodyPr rtlCol="0" anchor="ctr"/>
           <a:lstStyle/>
           <a:p>
             <a:pPr algn="ctr"/>
-            <a:r>
-              <a:rPr sz="2400" b="1">
-                <a:solidFill>
-                  <a:srgbClr val="FFB800"/>
-                </a:solidFill>
-                <a:latin typeface="Arial"/>
-              </a:rPr>
-              <a:t>📷 ЗУРАГ</a:t>
-            </a:r>
-          </a:p>
-          <a:p>
-            <a:pPr algn="ctr"/>
-            <a:r>
-              <a:rPr sz="1400">
-                <a:solidFill>
-                  <a:srgbClr val="555555"/>
-                </a:solidFill>
-                <a:latin typeface="Arial"/>
-              </a:rPr>
-              <a:t>
-Зар жагсаалт
-Өвс тэжээл, унаа, мал, ажиллах хүн</a:t>
-            </a:r>
-          </a:p>
-        </p:txBody>
-      </p:sp>
-      <p:sp>
-        <p:nvSpPr>
-          <p:cNvPr id="7" name="TextBox 6"/>
+          </a:p>
+        </p:txBody>
+      </p:sp>
+      <p:pic>
+        <p:nvPicPr>
+          <p:cNvPr id="7" name="Picture 6" descr="09-market.png"/>
+          <p:cNvPicPr>
+            <a:picLocks noChangeAspect="1"/>
+          </p:cNvPicPr>
+          <p:nvPr/>
+        </p:nvPicPr>
+        <p:blipFill>
+          <a:blip r:embed="rId2"/>
+          <a:stretch>
+            <a:fillRect/>
+          </a:stretch>
+        </p:blipFill>
+        <p:spPr>
+          <a:xfrm>
+            <a:off x="1368742" y="1280160"/>
+            <a:ext cx="2931795" cy="5212080"/>
+          </a:xfrm>
+          <a:prstGeom prst="rect">
+            <a:avLst/>
+          </a:prstGeom>
+        </p:spPr>
+      </p:pic>
+      <p:sp>
+        <p:nvSpPr>
+          <p:cNvPr id="8" name="TextBox 7"/>
           <p:cNvSpPr txBox="1"/>
           <p:nvPr/>
         </p:nvSpPr>
@@ -4477,7 +4486,7 @@
       </p:sp>
       <p:sp>
         <p:nvSpPr>
-          <p:cNvPr id="8" name="TextBox 7"/>
+          <p:cNvPr id="9" name="TextBox 8"/>
           <p:cNvSpPr txBox="1"/>
           <p:nvPr/>
         </p:nvSpPr>
@@ -4580,7 +4589,7 @@
       </p:sp>
       <p:sp>
         <p:nvSpPr>
-          <p:cNvPr id="9" name="TextBox 8"/>
+          <p:cNvPr id="10" name="TextBox 9"/>
           <p:cNvSpPr txBox="1"/>
           <p:nvPr/>
         </p:nvSpPr>
@@ -4615,7 +4624,7 @@
       </p:sp>
       <p:sp>
         <p:nvSpPr>
-          <p:cNvPr id="10" name="TextBox 9"/>
+          <p:cNvPr id="11" name="TextBox 10"/>
           <p:cNvSpPr txBox="1"/>
           <p:nvPr/>
         </p:nvSpPr>
@@ -4845,24 +4854,26 @@
       </p:sp>
       <p:sp>
         <p:nvSpPr>
-          <p:cNvPr id="6" name="Rectangle 5"/>
+          <p:cNvPr id="6" name="Rounded Rectangle 5"/>
           <p:cNvSpPr/>
           <p:nvPr/>
         </p:nvSpPr>
         <p:spPr>
           <a:xfrm>
-            <a:off x="457200" y="1280160"/>
-            <a:ext cx="4754880" cy="5212080"/>
-          </a:xfrm>
-          <a:prstGeom prst="rect">
-            <a:avLst/>
+            <a:off x="1251471" y="1162889"/>
+            <a:ext cx="3166337" cy="5446622"/>
+          </a:xfrm>
+          <a:prstGeom prst="roundRect">
+            <a:avLst>
+              <a:gd name="adj" fmla="val 5000"/>
+            </a:avLst>
           </a:prstGeom>
           <a:solidFill>
-            <a:srgbClr val="FFFFFF"/>
+            <a:srgbClr val="212121"/>
           </a:solidFill>
-          <a:ln w="38100">
+          <a:ln w="25400">
             <a:solidFill>
-              <a:srgbClr val="FFB800"/>
+              <a:srgbClr val="555555"/>
             </a:solidFill>
           </a:ln>
         </p:spPr>
@@ -4881,39 +4892,40 @@
           </a:fontRef>
         </p:style>
         <p:txBody>
-          <a:bodyPr rtlCol="0" anchor="ctr" wrap="square"/>
+          <a:bodyPr rtlCol="0" anchor="ctr"/>
           <a:lstStyle/>
           <a:p>
             <a:pPr algn="ctr"/>
-            <a:r>
-              <a:rPr sz="2400" b="1">
-                <a:solidFill>
-                  <a:srgbClr val="FFB800"/>
-                </a:solidFill>
-                <a:latin typeface="Arial"/>
-              </a:rPr>
-              <a:t>📷 ЗУРАГ</a:t>
-            </a:r>
-          </a:p>
-          <a:p>
-            <a:pPr algn="ctr"/>
-            <a:r>
-              <a:rPr sz="1400">
-                <a:solidFill>
-                  <a:srgbClr val="555555"/>
-                </a:solidFill>
-                <a:latin typeface="Arial"/>
-              </a:rPr>
-              <a:t>
-Мал эмчийн жагсаалт
-Цаг захиалах хуудас</a:t>
-            </a:r>
-          </a:p>
-        </p:txBody>
-      </p:sp>
-      <p:sp>
-        <p:nvSpPr>
-          <p:cNvPr id="7" name="TextBox 6"/>
+          </a:p>
+        </p:txBody>
+      </p:sp>
+      <p:pic>
+        <p:nvPicPr>
+          <p:cNvPr id="7" name="Picture 6" descr="10-vet.png"/>
+          <p:cNvPicPr>
+            <a:picLocks noChangeAspect="1"/>
+          </p:cNvPicPr>
+          <p:nvPr/>
+        </p:nvPicPr>
+        <p:blipFill>
+          <a:blip r:embed="rId2"/>
+          <a:stretch>
+            <a:fillRect/>
+          </a:stretch>
+        </p:blipFill>
+        <p:spPr>
+          <a:xfrm>
+            <a:off x="1368742" y="1280160"/>
+            <a:ext cx="2931795" cy="5212080"/>
+          </a:xfrm>
+          <a:prstGeom prst="rect">
+            <a:avLst/>
+          </a:prstGeom>
+        </p:spPr>
+      </p:pic>
+      <p:sp>
+        <p:nvSpPr>
+          <p:cNvPr id="8" name="TextBox 7"/>
           <p:cNvSpPr txBox="1"/>
           <p:nvPr/>
         </p:nvSpPr>
@@ -4948,7 +4960,7 @@
       </p:sp>
       <p:sp>
         <p:nvSpPr>
-          <p:cNvPr id="8" name="TextBox 7"/>
+          <p:cNvPr id="9" name="TextBox 8"/>
           <p:cNvSpPr txBox="1"/>
           <p:nvPr/>
         </p:nvSpPr>
@@ -5035,7 +5047,7 @@
       </p:sp>
       <p:sp>
         <p:nvSpPr>
-          <p:cNvPr id="9" name="TextBox 8"/>
+          <p:cNvPr id="10" name="TextBox 9"/>
           <p:cNvSpPr txBox="1"/>
           <p:nvPr/>
         </p:nvSpPr>
@@ -5070,7 +5082,7 @@
       </p:sp>
       <p:sp>
         <p:nvSpPr>
-          <p:cNvPr id="10" name="TextBox 9"/>
+          <p:cNvPr id="11" name="TextBox 10"/>
           <p:cNvSpPr txBox="1"/>
           <p:nvPr/>
         </p:nvSpPr>
@@ -5300,24 +5312,26 @@
       </p:sp>
       <p:sp>
         <p:nvSpPr>
-          <p:cNvPr id="6" name="Rectangle 5"/>
+          <p:cNvPr id="6" name="Rounded Rectangle 5"/>
           <p:cNvSpPr/>
           <p:nvPr/>
         </p:nvSpPr>
         <p:spPr>
           <a:xfrm>
-            <a:off x="457200" y="1280160"/>
-            <a:ext cx="4754880" cy="5212080"/>
-          </a:xfrm>
-          <a:prstGeom prst="rect">
-            <a:avLst/>
+            <a:off x="1251471" y="1162889"/>
+            <a:ext cx="3166337" cy="5446622"/>
+          </a:xfrm>
+          <a:prstGeom prst="roundRect">
+            <a:avLst>
+              <a:gd name="adj" fmla="val 5000"/>
+            </a:avLst>
           </a:prstGeom>
           <a:solidFill>
-            <a:srgbClr val="FFFFFF"/>
+            <a:srgbClr val="212121"/>
           </a:solidFill>
-          <a:ln w="38100">
+          <a:ln w="25400">
             <a:solidFill>
-              <a:srgbClr val="FFB800"/>
+              <a:srgbClr val="555555"/>
             </a:solidFill>
           </a:ln>
         </p:spPr>
@@ -5336,38 +5350,40 @@
           </a:fontRef>
         </p:style>
         <p:txBody>
-          <a:bodyPr rtlCol="0" anchor="ctr" wrap="square"/>
+          <a:bodyPr rtlCol="0" anchor="ctr"/>
           <a:lstStyle/>
           <a:p>
             <a:pPr algn="ctr"/>
-            <a:r>
-              <a:rPr sz="2400" b="1">
-                <a:solidFill>
-                  <a:srgbClr val="FFB800"/>
-                </a:solidFill>
-                <a:latin typeface="Arial"/>
-              </a:rPr>
-              <a:t>📷 ЗУРАГ</a:t>
-            </a:r>
-          </a:p>
-          <a:p>
-            <a:pPr algn="ctr"/>
-            <a:r>
-              <a:rPr sz="1400">
-                <a:solidFill>
-                  <a:srgbClr val="555555"/>
-                </a:solidFill>
-                <a:latin typeface="Arial"/>
-              </a:rPr>
-              <a:t>
-Сумын зарлал жагсаалт</a:t>
-            </a:r>
-          </a:p>
-        </p:txBody>
-      </p:sp>
-      <p:sp>
-        <p:nvSpPr>
-          <p:cNvPr id="7" name="TextBox 6"/>
+          </a:p>
+        </p:txBody>
+      </p:sp>
+      <p:pic>
+        <p:nvPicPr>
+          <p:cNvPr id="7" name="Picture 6" descr="11-news.png"/>
+          <p:cNvPicPr>
+            <a:picLocks noChangeAspect="1"/>
+          </p:cNvPicPr>
+          <p:nvPr/>
+        </p:nvPicPr>
+        <p:blipFill>
+          <a:blip r:embed="rId2"/>
+          <a:stretch>
+            <a:fillRect/>
+          </a:stretch>
+        </p:blipFill>
+        <p:spPr>
+          <a:xfrm>
+            <a:off x="1368742" y="1280160"/>
+            <a:ext cx="2931795" cy="5212080"/>
+          </a:xfrm>
+          <a:prstGeom prst="rect">
+            <a:avLst/>
+          </a:prstGeom>
+        </p:spPr>
+      </p:pic>
+      <p:sp>
+        <p:nvSpPr>
+          <p:cNvPr id="8" name="TextBox 7"/>
           <p:cNvSpPr txBox="1"/>
           <p:nvPr/>
         </p:nvSpPr>
@@ -5402,7 +5418,7 @@
       </p:sp>
       <p:sp>
         <p:nvSpPr>
-          <p:cNvPr id="8" name="TextBox 7"/>
+          <p:cNvPr id="9" name="TextBox 8"/>
           <p:cNvSpPr txBox="1"/>
           <p:nvPr/>
         </p:nvSpPr>
@@ -5489,7 +5505,7 @@
       </p:sp>
       <p:sp>
         <p:nvSpPr>
-          <p:cNvPr id="9" name="TextBox 8"/>
+          <p:cNvPr id="10" name="TextBox 9"/>
           <p:cNvSpPr txBox="1"/>
           <p:nvPr/>
         </p:nvSpPr>
@@ -5524,7 +5540,7 @@
       </p:sp>
       <p:sp>
         <p:nvSpPr>
-          <p:cNvPr id="10" name="TextBox 9"/>
+          <p:cNvPr id="11" name="TextBox 10"/>
           <p:cNvSpPr txBox="1"/>
           <p:nvPr/>
         </p:nvSpPr>
@@ -5754,24 +5770,26 @@
       </p:sp>
       <p:sp>
         <p:nvSpPr>
-          <p:cNvPr id="6" name="Rectangle 5"/>
+          <p:cNvPr id="6" name="Rounded Rectangle 5"/>
           <p:cNvSpPr/>
           <p:nvPr/>
         </p:nvSpPr>
         <p:spPr>
           <a:xfrm>
-            <a:off x="457200" y="1280160"/>
-            <a:ext cx="4754880" cy="5212080"/>
-          </a:xfrm>
-          <a:prstGeom prst="rect">
-            <a:avLst/>
+            <a:off x="1251471" y="1162889"/>
+            <a:ext cx="3166337" cy="5446622"/>
+          </a:xfrm>
+          <a:prstGeom prst="roundRect">
+            <a:avLst>
+              <a:gd name="adj" fmla="val 5000"/>
+            </a:avLst>
           </a:prstGeom>
           <a:solidFill>
-            <a:srgbClr val="FFFFFF"/>
+            <a:srgbClr val="212121"/>
           </a:solidFill>
-          <a:ln w="38100">
+          <a:ln w="25400">
             <a:solidFill>
-              <a:srgbClr val="FFB800"/>
+              <a:srgbClr val="555555"/>
             </a:solidFill>
           </a:ln>
         </p:spPr>
@@ -5790,39 +5808,40 @@
           </a:fontRef>
         </p:style>
         <p:txBody>
-          <a:bodyPr rtlCol="0" anchor="ctr" wrap="square"/>
+          <a:bodyPr rtlCol="0" anchor="ctr"/>
           <a:lstStyle/>
           <a:p>
             <a:pPr algn="ctr"/>
-            <a:r>
-              <a:rPr sz="2400" b="1">
-                <a:solidFill>
-                  <a:srgbClr val="FFB800"/>
-                </a:solidFill>
-                <a:latin typeface="Arial"/>
-              </a:rPr>
-              <a:t>📷 ЗУРАГ</a:t>
-            </a:r>
-          </a:p>
-          <a:p>
-            <a:pPr algn="ctr"/>
-            <a:r>
-              <a:rPr sz="1400">
-                <a:solidFill>
-                  <a:srgbClr val="555555"/>
-                </a:solidFill>
-                <a:latin typeface="Arial"/>
-              </a:rPr>
-              <a:t>
-Орлого зарлагын тэмдэглэл
-Өрхийн гишүүд</a:t>
-            </a:r>
-          </a:p>
-        </p:txBody>
-      </p:sp>
-      <p:sp>
-        <p:nvSpPr>
-          <p:cNvPr id="7" name="TextBox 6"/>
+          </a:p>
+        </p:txBody>
+      </p:sp>
+      <p:pic>
+        <p:nvPicPr>
+          <p:cNvPr id="7" name="Picture 6" descr="12-household.png"/>
+          <p:cNvPicPr>
+            <a:picLocks noChangeAspect="1"/>
+          </p:cNvPicPr>
+          <p:nvPr/>
+        </p:nvPicPr>
+        <p:blipFill>
+          <a:blip r:embed="rId2"/>
+          <a:stretch>
+            <a:fillRect/>
+          </a:stretch>
+        </p:blipFill>
+        <p:spPr>
+          <a:xfrm>
+            <a:off x="1368742" y="1280160"/>
+            <a:ext cx="2931795" cy="5212080"/>
+          </a:xfrm>
+          <a:prstGeom prst="rect">
+            <a:avLst/>
+          </a:prstGeom>
+        </p:spPr>
+      </p:pic>
+      <p:sp>
+        <p:nvSpPr>
+          <p:cNvPr id="8" name="TextBox 7"/>
           <p:cNvSpPr txBox="1"/>
           <p:nvPr/>
         </p:nvSpPr>
@@ -5857,7 +5876,7 @@
       </p:sp>
       <p:sp>
         <p:nvSpPr>
-          <p:cNvPr id="8" name="TextBox 7"/>
+          <p:cNvPr id="9" name="TextBox 8"/>
           <p:cNvSpPr txBox="1"/>
           <p:nvPr/>
         </p:nvSpPr>
@@ -5944,7 +5963,7 @@
       </p:sp>
       <p:sp>
         <p:nvSpPr>
-          <p:cNvPr id="9" name="TextBox 8"/>
+          <p:cNvPr id="10" name="TextBox 9"/>
           <p:cNvSpPr txBox="1"/>
           <p:nvPr/>
         </p:nvSpPr>
@@ -5979,7 +5998,7 @@
       </p:sp>
       <p:sp>
         <p:nvSpPr>
-          <p:cNvPr id="10" name="TextBox 9"/>
+          <p:cNvPr id="11" name="TextBox 10"/>
           <p:cNvSpPr txBox="1"/>
           <p:nvPr/>
         </p:nvSpPr>
@@ -7286,24 +7305,26 @@
       </p:sp>
       <p:sp>
         <p:nvSpPr>
-          <p:cNvPr id="6" name="Rectangle 5"/>
+          <p:cNvPr id="6" name="Rounded Rectangle 5"/>
           <p:cNvSpPr/>
           <p:nvPr/>
         </p:nvSpPr>
         <p:spPr>
           <a:xfrm>
-            <a:off x="457200" y="1280160"/>
-            <a:ext cx="4572000" cy="5212080"/>
-          </a:xfrm>
-          <a:prstGeom prst="rect">
-            <a:avLst/>
+            <a:off x="1160031" y="1162889"/>
+            <a:ext cx="3166337" cy="5446622"/>
+          </a:xfrm>
+          <a:prstGeom prst="roundRect">
+            <a:avLst>
+              <a:gd name="adj" fmla="val 5000"/>
+            </a:avLst>
           </a:prstGeom>
           <a:solidFill>
-            <a:srgbClr val="FFFFFF"/>
+            <a:srgbClr val="212121"/>
           </a:solidFill>
-          <a:ln w="38100">
+          <a:ln w="25400">
             <a:solidFill>
-              <a:srgbClr val="FFB800"/>
+              <a:srgbClr val="555555"/>
             </a:solidFill>
           </a:ln>
         </p:spPr>
@@ -7322,40 +7343,40 @@
           </a:fontRef>
         </p:style>
         <p:txBody>
-          <a:bodyPr rtlCol="0" anchor="ctr" wrap="square"/>
+          <a:bodyPr rtlCol="0" anchor="ctr"/>
           <a:lstStyle/>
           <a:p>
             <a:pPr algn="ctr"/>
-            <a:r>
-              <a:rPr sz="2400" b="1">
-                <a:solidFill>
-                  <a:srgbClr val="FFB800"/>
-                </a:solidFill>
-                <a:latin typeface="Arial"/>
-              </a:rPr>
-              <a:t>📷 ЗУРАГ</a:t>
-            </a:r>
-          </a:p>
-          <a:p>
-            <a:pPr algn="ctr"/>
-            <a:r>
-              <a:rPr sz="1400">
-                <a:solidFill>
-                  <a:srgbClr val="555555"/>
-                </a:solidFill>
-                <a:latin typeface="Arial"/>
-              </a:rPr>
-              <a:t>
-Багийн даргын самбар
-Өрхүүдийн жагсаалт, эрсдэл,
-мэдэгдэл явуулах товч</a:t>
-            </a:r>
-          </a:p>
-        </p:txBody>
-      </p:sp>
-      <p:sp>
-        <p:nvSpPr>
-          <p:cNvPr id="7" name="Rounded Rectangle 6"/>
+          </a:p>
+        </p:txBody>
+      </p:sp>
+      <p:pic>
+        <p:nvPicPr>
+          <p:cNvPr id="7" name="Picture 6" descr="14-bag-dashboard.png"/>
+          <p:cNvPicPr>
+            <a:picLocks noChangeAspect="1"/>
+          </p:cNvPicPr>
+          <p:nvPr/>
+        </p:nvPicPr>
+        <p:blipFill>
+          <a:blip r:embed="rId2"/>
+          <a:stretch>
+            <a:fillRect/>
+          </a:stretch>
+        </p:blipFill>
+        <p:spPr>
+          <a:xfrm>
+            <a:off x="1277302" y="1280160"/>
+            <a:ext cx="2931795" cy="5212080"/>
+          </a:xfrm>
+          <a:prstGeom prst="rect">
+            <a:avLst/>
+          </a:prstGeom>
+        </p:spPr>
+      </p:pic>
+      <p:sp>
+        <p:nvSpPr>
+          <p:cNvPr id="8" name="Rounded Rectangle 7"/>
           <p:cNvSpPr/>
           <p:nvPr/>
         </p:nvSpPr>
@@ -7425,7 +7446,7 @@
       </p:sp>
       <p:sp>
         <p:nvSpPr>
-          <p:cNvPr id="8" name="Rounded Rectangle 7"/>
+          <p:cNvPr id="9" name="Rounded Rectangle 8"/>
           <p:cNvSpPr/>
           <p:nvPr/>
         </p:nvSpPr>
@@ -7495,7 +7516,7 @@
       </p:sp>
       <p:sp>
         <p:nvSpPr>
-          <p:cNvPr id="9" name="Rounded Rectangle 8"/>
+          <p:cNvPr id="10" name="Rounded Rectangle 9"/>
           <p:cNvSpPr/>
           <p:nvPr/>
         </p:nvSpPr>
@@ -7565,7 +7586,7 @@
       </p:sp>
       <p:sp>
         <p:nvSpPr>
-          <p:cNvPr id="10" name="Rounded Rectangle 9"/>
+          <p:cNvPr id="11" name="Rounded Rectangle 10"/>
           <p:cNvSpPr/>
           <p:nvPr/>
         </p:nvSpPr>
@@ -12884,24 +12905,26 @@
       </p:sp>
       <p:sp>
         <p:nvSpPr>
-          <p:cNvPr id="6" name="Rectangle 5"/>
+          <p:cNvPr id="6" name="Rounded Rectangle 5"/>
           <p:cNvSpPr/>
           <p:nvPr/>
         </p:nvSpPr>
         <p:spPr>
           <a:xfrm>
-            <a:off x="457200" y="1280160"/>
-            <a:ext cx="4754880" cy="5212080"/>
-          </a:xfrm>
-          <a:prstGeom prst="rect">
-            <a:avLst/>
+            <a:off x="1251471" y="1162889"/>
+            <a:ext cx="3166337" cy="5446622"/>
+          </a:xfrm>
+          <a:prstGeom prst="roundRect">
+            <a:avLst>
+              <a:gd name="adj" fmla="val 5000"/>
+            </a:avLst>
           </a:prstGeom>
           <a:solidFill>
-            <a:srgbClr val="FFFFFF"/>
+            <a:srgbClr val="212121"/>
           </a:solidFill>
-          <a:ln w="38100">
+          <a:ln w="25400">
             <a:solidFill>
-              <a:srgbClr val="FFB800"/>
+              <a:srgbClr val="555555"/>
             </a:solidFill>
           </a:ln>
         </p:spPr>
@@ -12920,39 +12943,40 @@
           </a:fontRef>
         </p:style>
         <p:txBody>
-          <a:bodyPr rtlCol="0" anchor="ctr" wrap="square"/>
+          <a:bodyPr rtlCol="0" anchor="ctr"/>
           <a:lstStyle/>
           <a:p>
             <a:pPr algn="ctr"/>
-            <a:r>
-              <a:rPr sz="2400" b="1">
-                <a:solidFill>
-                  <a:srgbClr val="FFB800"/>
-                </a:solidFill>
-                <a:latin typeface="Arial"/>
-              </a:rPr>
-              <a:t>📷 ЗУРАГ</a:t>
-            </a:r>
-          </a:p>
-          <a:p>
-            <a:pPr algn="ctr"/>
-            <a:r>
-              <a:rPr sz="1400">
-                <a:solidFill>
-                  <a:srgbClr val="555555"/>
-                </a:solidFill>
-                <a:latin typeface="Arial"/>
-              </a:rPr>
-              <a:t>
-Утасны дугаар оруулах хуудас
-Дараа нь мессежээр нууц код ирнэ</a:t>
-            </a:r>
-          </a:p>
-        </p:txBody>
-      </p:sp>
-      <p:sp>
-        <p:nvSpPr>
-          <p:cNvPr id="7" name="TextBox 6"/>
+          </a:p>
+        </p:txBody>
+      </p:sp>
+      <p:pic>
+        <p:nvPicPr>
+          <p:cNvPr id="7" name="Picture 6" descr="01-phone.png"/>
+          <p:cNvPicPr>
+            <a:picLocks noChangeAspect="1"/>
+          </p:cNvPicPr>
+          <p:nvPr/>
+        </p:nvPicPr>
+        <p:blipFill>
+          <a:blip r:embed="rId2"/>
+          <a:stretch>
+            <a:fillRect/>
+          </a:stretch>
+        </p:blipFill>
+        <p:spPr>
+          <a:xfrm>
+            <a:off x="1368742" y="1280160"/>
+            <a:ext cx="2931795" cy="5212080"/>
+          </a:xfrm>
+          <a:prstGeom prst="rect">
+            <a:avLst/>
+          </a:prstGeom>
+        </p:spPr>
+      </p:pic>
+      <p:sp>
+        <p:nvSpPr>
+          <p:cNvPr id="8" name="TextBox 7"/>
           <p:cNvSpPr txBox="1"/>
           <p:nvPr/>
         </p:nvSpPr>
@@ -12987,7 +13011,7 @@
       </p:sp>
       <p:sp>
         <p:nvSpPr>
-          <p:cNvPr id="8" name="TextBox 7"/>
+          <p:cNvPr id="9" name="TextBox 8"/>
           <p:cNvSpPr txBox="1"/>
           <p:nvPr/>
         </p:nvSpPr>
@@ -13074,7 +13098,7 @@
       </p:sp>
       <p:sp>
         <p:nvSpPr>
-          <p:cNvPr id="9" name="TextBox 8"/>
+          <p:cNvPr id="10" name="TextBox 9"/>
           <p:cNvSpPr txBox="1"/>
           <p:nvPr/>
         </p:nvSpPr>
@@ -13109,7 +13133,7 @@
       </p:sp>
       <p:sp>
         <p:nvSpPr>
-          <p:cNvPr id="10" name="TextBox 9"/>
+          <p:cNvPr id="11" name="TextBox 10"/>
           <p:cNvSpPr txBox="1"/>
           <p:nvPr/>
         </p:nvSpPr>
@@ -13339,24 +13363,26 @@
       </p:sp>
       <p:sp>
         <p:nvSpPr>
-          <p:cNvPr id="6" name="Rectangle 5"/>
+          <p:cNvPr id="6" name="Rounded Rectangle 5"/>
           <p:cNvSpPr/>
           <p:nvPr/>
         </p:nvSpPr>
         <p:spPr>
           <a:xfrm>
-            <a:off x="457200" y="1280160"/>
-            <a:ext cx="4754880" cy="5212080"/>
-          </a:xfrm>
-          <a:prstGeom prst="rect">
-            <a:avLst/>
+            <a:off x="1251471" y="1162889"/>
+            <a:ext cx="3166337" cy="5446622"/>
+          </a:xfrm>
+          <a:prstGeom prst="roundRect">
+            <a:avLst>
+              <a:gd name="adj" fmla="val 5000"/>
+            </a:avLst>
           </a:prstGeom>
           <a:solidFill>
-            <a:srgbClr val="FFFFFF"/>
+            <a:srgbClr val="212121"/>
           </a:solidFill>
-          <a:ln w="38100">
+          <a:ln w="25400">
             <a:solidFill>
-              <a:srgbClr val="FFB800"/>
+              <a:srgbClr val="555555"/>
             </a:solidFill>
           </a:ln>
         </p:spPr>
@@ -13375,40 +13401,40 @@
           </a:fontRef>
         </p:style>
         <p:txBody>
-          <a:bodyPr rtlCol="0" anchor="ctr" wrap="square"/>
+          <a:bodyPr rtlCol="0" anchor="ctr"/>
           <a:lstStyle/>
           <a:p>
             <a:pPr algn="ctr"/>
-            <a:r>
-              <a:rPr sz="2400" b="1">
-                <a:solidFill>
-                  <a:srgbClr val="FFB800"/>
-                </a:solidFill>
-                <a:latin typeface="Arial"/>
-              </a:rPr>
-              <a:t>📷 ЗУРАГ</a:t>
-            </a:r>
-          </a:p>
-          <a:p>
-            <a:pPr algn="ctr"/>
-            <a:r>
-              <a:rPr sz="1400">
-                <a:solidFill>
-                  <a:srgbClr val="555555"/>
-                </a:solidFill>
-                <a:latin typeface="Arial"/>
-              </a:rPr>
-              <a:t>
-Овог нэр, аймаг сум баг сонгох
-4 улирлын байршлыг тэмдэглэх
-Малын тоог оруулах</a:t>
-            </a:r>
-          </a:p>
-        </p:txBody>
-      </p:sp>
-      <p:sp>
-        <p:nvSpPr>
-          <p:cNvPr id="7" name="TextBox 6"/>
+          </a:p>
+        </p:txBody>
+      </p:sp>
+      <p:pic>
+        <p:nvPicPr>
+          <p:cNvPr id="7" name="Picture 6" descr="02-role.png"/>
+          <p:cNvPicPr>
+            <a:picLocks noChangeAspect="1"/>
+          </p:cNvPicPr>
+          <p:nvPr/>
+        </p:nvPicPr>
+        <p:blipFill>
+          <a:blip r:embed="rId2"/>
+          <a:stretch>
+            <a:fillRect/>
+          </a:stretch>
+        </p:blipFill>
+        <p:spPr>
+          <a:xfrm>
+            <a:off x="1368742" y="1280160"/>
+            <a:ext cx="2931795" cy="5212080"/>
+          </a:xfrm>
+          <a:prstGeom prst="rect">
+            <a:avLst/>
+          </a:prstGeom>
+        </p:spPr>
+      </p:pic>
+      <p:sp>
+        <p:nvSpPr>
+          <p:cNvPr id="8" name="TextBox 7"/>
           <p:cNvSpPr txBox="1"/>
           <p:nvPr/>
         </p:nvSpPr>
@@ -13443,7 +13469,7 @@
       </p:sp>
       <p:sp>
         <p:nvSpPr>
-          <p:cNvPr id="8" name="TextBox 7"/>
+          <p:cNvPr id="9" name="TextBox 8"/>
           <p:cNvSpPr txBox="1"/>
           <p:nvPr/>
         </p:nvSpPr>
@@ -13578,7 +13604,7 @@
       </p:sp>
       <p:sp>
         <p:nvSpPr>
-          <p:cNvPr id="9" name="TextBox 8"/>
+          <p:cNvPr id="10" name="TextBox 9"/>
           <p:cNvSpPr txBox="1"/>
           <p:nvPr/>
         </p:nvSpPr>
@@ -13613,7 +13639,7 @@
       </p:sp>
       <p:sp>
         <p:nvSpPr>
-          <p:cNvPr id="10" name="TextBox 9"/>
+          <p:cNvPr id="11" name="TextBox 10"/>
           <p:cNvSpPr txBox="1"/>
           <p:nvPr/>
         </p:nvSpPr>
@@ -13843,24 +13869,26 @@
       </p:sp>
       <p:sp>
         <p:nvSpPr>
-          <p:cNvPr id="6" name="Rectangle 5"/>
+          <p:cNvPr id="6" name="Rounded Rectangle 5"/>
           <p:cNvSpPr/>
           <p:nvPr/>
         </p:nvSpPr>
         <p:spPr>
           <a:xfrm>
-            <a:off x="457200" y="1280160"/>
-            <a:ext cx="4114800" cy="5212080"/>
-          </a:xfrm>
-          <a:prstGeom prst="rect">
-            <a:avLst/>
+            <a:off x="931431" y="1162889"/>
+            <a:ext cx="3166337" cy="5446622"/>
+          </a:xfrm>
+          <a:prstGeom prst="roundRect">
+            <a:avLst>
+              <a:gd name="adj" fmla="val 5000"/>
+            </a:avLst>
           </a:prstGeom>
           <a:solidFill>
-            <a:srgbClr val="FFFFFF"/>
+            <a:srgbClr val="212121"/>
           </a:solidFill>
-          <a:ln w="38100">
+          <a:ln w="25400">
             <a:solidFill>
-              <a:srgbClr val="FFB800"/>
+              <a:srgbClr val="555555"/>
             </a:solidFill>
           </a:ln>
         </p:spPr>
@@ -13879,39 +13907,40 @@
           </a:fontRef>
         </p:style>
         <p:txBody>
-          <a:bodyPr rtlCol="0" anchor="ctr" wrap="square"/>
+          <a:bodyPr rtlCol="0" anchor="ctr"/>
           <a:lstStyle/>
           <a:p>
             <a:pPr algn="ctr"/>
-            <a:r>
-              <a:rPr sz="2400" b="1">
-                <a:solidFill>
-                  <a:srgbClr val="FFB800"/>
-                </a:solidFill>
-                <a:latin typeface="Arial"/>
-              </a:rPr>
-              <a:t>📷 ЗУРАГ</a:t>
-            </a:r>
-          </a:p>
-          <a:p>
-            <a:pPr algn="ctr"/>
-            <a:r>
-              <a:rPr sz="1400">
-                <a:solidFill>
-                  <a:srgbClr val="555555"/>
-                </a:solidFill>
-                <a:latin typeface="Arial"/>
-              </a:rPr>
-              <a:t>
-Нүүр хуудас
-Цаг агаар, өнөөдөр хийх ажил, мэдэгдэл</a:t>
-            </a:r>
-          </a:p>
-        </p:txBody>
-      </p:sp>
-      <p:sp>
-        <p:nvSpPr>
-          <p:cNvPr id="7" name="Rounded Rectangle 6"/>
+          </a:p>
+        </p:txBody>
+      </p:sp>
+      <p:pic>
+        <p:nvPicPr>
+          <p:cNvPr id="7" name="Picture 6" descr="03-home.png"/>
+          <p:cNvPicPr>
+            <a:picLocks noChangeAspect="1"/>
+          </p:cNvPicPr>
+          <p:nvPr/>
+        </p:nvPicPr>
+        <p:blipFill>
+          <a:blip r:embed="rId2"/>
+          <a:stretch>
+            <a:fillRect/>
+          </a:stretch>
+        </p:blipFill>
+        <p:spPr>
+          <a:xfrm>
+            <a:off x="1048702" y="1280160"/>
+            <a:ext cx="2931795" cy="5212080"/>
+          </a:xfrm>
+          <a:prstGeom prst="rect">
+            <a:avLst/>
+          </a:prstGeom>
+        </p:spPr>
+      </p:pic>
+      <p:sp>
+        <p:nvSpPr>
+          <p:cNvPr id="8" name="Rounded Rectangle 7"/>
           <p:cNvSpPr/>
           <p:nvPr/>
         </p:nvSpPr>
@@ -13984,7 +14013,7 @@
       </p:sp>
       <p:sp>
         <p:nvSpPr>
-          <p:cNvPr id="8" name="Rounded Rectangle 7"/>
+          <p:cNvPr id="9" name="Rounded Rectangle 8"/>
           <p:cNvSpPr/>
           <p:nvPr/>
         </p:nvSpPr>
@@ -14057,7 +14086,7 @@
       </p:sp>
       <p:sp>
         <p:nvSpPr>
-          <p:cNvPr id="9" name="Rounded Rectangle 8"/>
+          <p:cNvPr id="10" name="Rounded Rectangle 9"/>
           <p:cNvSpPr/>
           <p:nvPr/>
         </p:nvSpPr>
@@ -14130,7 +14159,7 @@
       </p:sp>
       <p:sp>
         <p:nvSpPr>
-          <p:cNvPr id="10" name="Rounded Rectangle 9"/>
+          <p:cNvPr id="11" name="Rounded Rectangle 10"/>
           <p:cNvSpPr/>
           <p:nvPr/>
         </p:nvSpPr>
@@ -14203,7 +14232,7 @@
       </p:sp>
       <p:sp>
         <p:nvSpPr>
-          <p:cNvPr id="11" name="Rounded Rectangle 10"/>
+          <p:cNvPr id="12" name="Rounded Rectangle 11"/>
           <p:cNvSpPr/>
           <p:nvPr/>
         </p:nvSpPr>
@@ -14276,7 +14305,7 @@
       </p:sp>
       <p:sp>
         <p:nvSpPr>
-          <p:cNvPr id="12" name="Rounded Rectangle 11"/>
+          <p:cNvPr id="13" name="Rounded Rectangle 12"/>
           <p:cNvSpPr/>
           <p:nvPr/>
         </p:nvSpPr>
@@ -14349,7 +14378,7 @@
       </p:sp>
       <p:sp>
         <p:nvSpPr>
-          <p:cNvPr id="13" name="Rounded Rectangle 12"/>
+          <p:cNvPr id="14" name="Rounded Rectangle 13"/>
           <p:cNvSpPr/>
           <p:nvPr/>
         </p:nvSpPr>
@@ -14422,7 +14451,7 @@
       </p:sp>
       <p:sp>
         <p:nvSpPr>
-          <p:cNvPr id="14" name="Rounded Rectangle 13"/>
+          <p:cNvPr id="15" name="Rounded Rectangle 14"/>
           <p:cNvSpPr/>
           <p:nvPr/>
         </p:nvSpPr>
@@ -14495,7 +14524,7 @@
       </p:sp>
       <p:sp>
         <p:nvSpPr>
-          <p:cNvPr id="15" name="Rounded Rectangle 14"/>
+          <p:cNvPr id="16" name="Rounded Rectangle 15"/>
           <p:cNvSpPr/>
           <p:nvPr/>
         </p:nvSpPr>
@@ -14743,24 +14772,26 @@
       </p:sp>
       <p:sp>
         <p:nvSpPr>
-          <p:cNvPr id="6" name="Rectangle 5"/>
+          <p:cNvPr id="6" name="Rounded Rectangle 5"/>
           <p:cNvSpPr/>
           <p:nvPr/>
         </p:nvSpPr>
         <p:spPr>
           <a:xfrm>
-            <a:off x="457200" y="1280160"/>
-            <a:ext cx="4754880" cy="5212080"/>
-          </a:xfrm>
-          <a:prstGeom prst="rect">
-            <a:avLst/>
+            <a:off x="1251471" y="1162889"/>
+            <a:ext cx="3166337" cy="5446622"/>
+          </a:xfrm>
+          <a:prstGeom prst="roundRect">
+            <a:avLst>
+              <a:gd name="adj" fmla="val 5000"/>
+            </a:avLst>
           </a:prstGeom>
           <a:solidFill>
-            <a:srgbClr val="FFFFFF"/>
+            <a:srgbClr val="212121"/>
           </a:solidFill>
-          <a:ln w="38100">
+          <a:ln w="25400">
             <a:solidFill>
-              <a:srgbClr val="FFB800"/>
+              <a:srgbClr val="555555"/>
             </a:solidFill>
           </a:ln>
         </p:spPr>
@@ -14779,39 +14810,40 @@
           </a:fontRef>
         </p:style>
         <p:txBody>
-          <a:bodyPr rtlCol="0" anchor="ctr" wrap="square"/>
+          <a:bodyPr rtlCol="0" anchor="ctr"/>
           <a:lstStyle/>
           <a:p>
             <a:pPr algn="ctr"/>
-            <a:r>
-              <a:rPr sz="2400" b="1">
-                <a:solidFill>
-                  <a:srgbClr val="FFB800"/>
-                </a:solidFill>
-                <a:latin typeface="Arial"/>
-              </a:rPr>
-              <a:t>📷 ЗУРАГ</a:t>
-            </a:r>
-          </a:p>
-          <a:p>
-            <a:pPr algn="ctr"/>
-            <a:r>
-              <a:rPr sz="1400">
-                <a:solidFill>
-                  <a:srgbClr val="555555"/>
-                </a:solidFill>
-                <a:latin typeface="Arial"/>
-              </a:rPr>
-              <a:t>
-Малын тоо толгой
-Нэмэх, хасах товч энгийн</a:t>
-            </a:r>
-          </a:p>
-        </p:txBody>
-      </p:sp>
-      <p:sp>
-        <p:nvSpPr>
-          <p:cNvPr id="7" name="TextBox 6"/>
+          </a:p>
+        </p:txBody>
+      </p:sp>
+      <p:pic>
+        <p:nvPicPr>
+          <p:cNvPr id="7" name="Picture 6" descr="04-livestock.png"/>
+          <p:cNvPicPr>
+            <a:picLocks noChangeAspect="1"/>
+          </p:cNvPicPr>
+          <p:nvPr/>
+        </p:nvPicPr>
+        <p:blipFill>
+          <a:blip r:embed="rId2"/>
+          <a:stretch>
+            <a:fillRect/>
+          </a:stretch>
+        </p:blipFill>
+        <p:spPr>
+          <a:xfrm>
+            <a:off x="1368742" y="1280160"/>
+            <a:ext cx="2931795" cy="5212080"/>
+          </a:xfrm>
+          <a:prstGeom prst="rect">
+            <a:avLst/>
+          </a:prstGeom>
+        </p:spPr>
+      </p:pic>
+      <p:sp>
+        <p:nvSpPr>
+          <p:cNvPr id="8" name="TextBox 7"/>
           <p:cNvSpPr txBox="1"/>
           <p:nvPr/>
         </p:nvSpPr>
@@ -14846,7 +14878,7 @@
       </p:sp>
       <p:sp>
         <p:nvSpPr>
-          <p:cNvPr id="8" name="TextBox 7"/>
+          <p:cNvPr id="9" name="TextBox 8"/>
           <p:cNvSpPr txBox="1"/>
           <p:nvPr/>
         </p:nvSpPr>
@@ -14933,7 +14965,7 @@
       </p:sp>
       <p:sp>
         <p:nvSpPr>
-          <p:cNvPr id="9" name="TextBox 8"/>
+          <p:cNvPr id="10" name="TextBox 9"/>
           <p:cNvSpPr txBox="1"/>
           <p:nvPr/>
         </p:nvSpPr>
@@ -14968,7 +15000,7 @@
       </p:sp>
       <p:sp>
         <p:nvSpPr>
-          <p:cNvPr id="10" name="TextBox 9"/>
+          <p:cNvPr id="11" name="TextBox 10"/>
           <p:cNvSpPr txBox="1"/>
           <p:nvPr/>
         </p:nvSpPr>
@@ -15198,24 +15230,26 @@
       </p:sp>
       <p:sp>
         <p:nvSpPr>
-          <p:cNvPr id="6" name="Rectangle 5"/>
+          <p:cNvPr id="6" name="Rounded Rectangle 5"/>
           <p:cNvSpPr/>
           <p:nvPr/>
         </p:nvSpPr>
         <p:spPr>
           <a:xfrm>
-            <a:off x="457200" y="1280160"/>
-            <a:ext cx="4754880" cy="5212080"/>
-          </a:xfrm>
-          <a:prstGeom prst="rect">
-            <a:avLst/>
+            <a:off x="1251471" y="1162889"/>
+            <a:ext cx="3166337" cy="5446622"/>
+          </a:xfrm>
+          <a:prstGeom prst="roundRect">
+            <a:avLst>
+              <a:gd name="adj" fmla="val 5000"/>
+            </a:avLst>
           </a:prstGeom>
           <a:solidFill>
-            <a:srgbClr val="FFFFFF"/>
+            <a:srgbClr val="212121"/>
           </a:solidFill>
-          <a:ln w="38100">
+          <a:ln w="25400">
             <a:solidFill>
-              <a:srgbClr val="FFB800"/>
+              <a:srgbClr val="555555"/>
             </a:solidFill>
           </a:ln>
         </p:spPr>
@@ -15234,39 +15268,40 @@
           </a:fontRef>
         </p:style>
         <p:txBody>
-          <a:bodyPr rtlCol="0" anchor="ctr" wrap="square"/>
+          <a:bodyPr rtlCol="0" anchor="ctr"/>
           <a:lstStyle/>
           <a:p>
             <a:pPr algn="ctr"/>
-            <a:r>
-              <a:rPr sz="2400" b="1">
-                <a:solidFill>
-                  <a:srgbClr val="FFB800"/>
-                </a:solidFill>
-                <a:latin typeface="Arial"/>
-              </a:rPr>
-              <a:t>📷 ЗУРАГ</a:t>
-            </a:r>
-          </a:p>
-          <a:p>
-            <a:pPr algn="ctr"/>
-            <a:r>
-              <a:rPr sz="1400">
-                <a:solidFill>
-                  <a:srgbClr val="555555"/>
-                </a:solidFill>
-                <a:latin typeface="Arial"/>
-              </a:rPr>
-              <a:t>
-Газрын зураг
-Өвөлжөө, хаваржаа, зуслан, намаржаа</a:t>
-            </a:r>
-          </a:p>
-        </p:txBody>
-      </p:sp>
-      <p:sp>
-        <p:nvSpPr>
-          <p:cNvPr id="7" name="TextBox 6"/>
+          </a:p>
+        </p:txBody>
+      </p:sp>
+      <p:pic>
+        <p:nvPicPr>
+          <p:cNvPr id="7" name="Picture 6" descr="05-pasture.png"/>
+          <p:cNvPicPr>
+            <a:picLocks noChangeAspect="1"/>
+          </p:cNvPicPr>
+          <p:nvPr/>
+        </p:nvPicPr>
+        <p:blipFill>
+          <a:blip r:embed="rId2"/>
+          <a:stretch>
+            <a:fillRect/>
+          </a:stretch>
+        </p:blipFill>
+        <p:spPr>
+          <a:xfrm>
+            <a:off x="1368742" y="1280160"/>
+            <a:ext cx="2931795" cy="5212080"/>
+          </a:xfrm>
+          <a:prstGeom prst="rect">
+            <a:avLst/>
+          </a:prstGeom>
+        </p:spPr>
+      </p:pic>
+      <p:sp>
+        <p:nvSpPr>
+          <p:cNvPr id="8" name="TextBox 7"/>
           <p:cNvSpPr txBox="1"/>
           <p:nvPr/>
         </p:nvSpPr>
@@ -15301,7 +15336,7 @@
       </p:sp>
       <p:sp>
         <p:nvSpPr>
-          <p:cNvPr id="8" name="TextBox 7"/>
+          <p:cNvPr id="9" name="TextBox 8"/>
           <p:cNvSpPr txBox="1"/>
           <p:nvPr/>
         </p:nvSpPr>
@@ -15372,7 +15407,7 @@
       </p:sp>
       <p:sp>
         <p:nvSpPr>
-          <p:cNvPr id="9" name="TextBox 8"/>
+          <p:cNvPr id="10" name="TextBox 9"/>
           <p:cNvSpPr txBox="1"/>
           <p:nvPr/>
         </p:nvSpPr>
@@ -15407,7 +15442,7 @@
       </p:sp>
       <p:sp>
         <p:nvSpPr>
-          <p:cNvPr id="10" name="TextBox 9"/>
+          <p:cNvPr id="11" name="TextBox 10"/>
           <p:cNvSpPr txBox="1"/>
           <p:nvPr/>
         </p:nvSpPr>
@@ -15637,24 +15672,26 @@
       </p:sp>
       <p:sp>
         <p:nvSpPr>
-          <p:cNvPr id="6" name="Rectangle 5"/>
+          <p:cNvPr id="6" name="Rounded Rectangle 5"/>
           <p:cNvSpPr/>
           <p:nvPr/>
         </p:nvSpPr>
         <p:spPr>
           <a:xfrm>
-            <a:off x="457200" y="1280160"/>
-            <a:ext cx="4754880" cy="5212080"/>
-          </a:xfrm>
-          <a:prstGeom prst="rect">
-            <a:avLst/>
+            <a:off x="1251471" y="1162889"/>
+            <a:ext cx="3166337" cy="5446622"/>
+          </a:xfrm>
+          <a:prstGeom prst="roundRect">
+            <a:avLst>
+              <a:gd name="adj" fmla="val 5000"/>
+            </a:avLst>
           </a:prstGeom>
           <a:solidFill>
-            <a:srgbClr val="FFFFFF"/>
+            <a:srgbClr val="212121"/>
           </a:solidFill>
-          <a:ln w="38100">
+          <a:ln w="25400">
             <a:solidFill>
-              <a:srgbClr val="FFB800"/>
+              <a:srgbClr val="555555"/>
             </a:solidFill>
           </a:ln>
         </p:spPr>
@@ -15673,39 +15710,40 @@
           </a:fontRef>
         </p:style>
         <p:txBody>
-          <a:bodyPr rtlCol="0" anchor="ctr" wrap="square"/>
+          <a:bodyPr rtlCol="0" anchor="ctr"/>
           <a:lstStyle/>
           <a:p>
             <a:pPr algn="ctr"/>
-            <a:r>
-              <a:rPr sz="2400" b="1">
-                <a:solidFill>
-                  <a:srgbClr val="FFB800"/>
-                </a:solidFill>
-                <a:latin typeface="Arial"/>
-              </a:rPr>
-              <a:t>📷 ЗУРАГ</a:t>
-            </a:r>
-          </a:p>
-          <a:p>
-            <a:pPr algn="ctr"/>
-            <a:r>
-              <a:rPr sz="1400">
-                <a:solidFill>
-                  <a:srgbClr val="555555"/>
-                </a:solidFill>
-                <a:latin typeface="Arial"/>
-              </a:rPr>
-              <a:t>
-Зөвлөгөө асуух хуудас
-Хариултын карт</a:t>
-            </a:r>
-          </a:p>
-        </p:txBody>
-      </p:sp>
-      <p:sp>
-        <p:nvSpPr>
-          <p:cNvPr id="7" name="TextBox 6"/>
+          </a:p>
+        </p:txBody>
+      </p:sp>
+      <p:pic>
+        <p:nvPicPr>
+          <p:cNvPr id="7" name="Picture 6" descr="06-advisory.png"/>
+          <p:cNvPicPr>
+            <a:picLocks noChangeAspect="1"/>
+          </p:cNvPicPr>
+          <p:nvPr/>
+        </p:nvPicPr>
+        <p:blipFill>
+          <a:blip r:embed="rId2"/>
+          <a:stretch>
+            <a:fillRect/>
+          </a:stretch>
+        </p:blipFill>
+        <p:spPr>
+          <a:xfrm>
+            <a:off x="1368742" y="1280160"/>
+            <a:ext cx="2931795" cy="5212080"/>
+          </a:xfrm>
+          <a:prstGeom prst="rect">
+            <a:avLst/>
+          </a:prstGeom>
+        </p:spPr>
+      </p:pic>
+      <p:sp>
+        <p:nvSpPr>
+          <p:cNvPr id="8" name="TextBox 7"/>
           <p:cNvSpPr txBox="1"/>
           <p:nvPr/>
         </p:nvSpPr>
@@ -15740,7 +15778,7 @@
       </p:sp>
       <p:sp>
         <p:nvSpPr>
-          <p:cNvPr id="8" name="TextBox 7"/>
+          <p:cNvPr id="9" name="TextBox 8"/>
           <p:cNvSpPr txBox="1"/>
           <p:nvPr/>
         </p:nvSpPr>
@@ -15811,7 +15849,7 @@
       </p:sp>
       <p:sp>
         <p:nvSpPr>
-          <p:cNvPr id="9" name="TextBox 8"/>
+          <p:cNvPr id="10" name="TextBox 9"/>
           <p:cNvSpPr txBox="1"/>
           <p:nvPr/>
         </p:nvSpPr>
@@ -15846,7 +15884,7 @@
       </p:sp>
       <p:sp>
         <p:nvSpPr>
-          <p:cNvPr id="10" name="TextBox 9"/>
+          <p:cNvPr id="11" name="TextBox 10"/>
           <p:cNvSpPr txBox="1"/>
           <p:nvPr/>
         </p:nvSpPr>
